--- a/Building_GARY_with_AI.pptx
+++ b/Building_GARY_with_AI.pptx
@@ -3317,7 +3317,7 @@
                 </a:solidFill>
                 <a:latin typeface="Calibri"/>
               </a:rPr>
-              <a:t>A least-cost model of the Eastern Australian gas market — built with an AI coding assistant</a:t>
+              <a:t>A least-cost model of the Eastern Australian &amp; NT gas market — built with an AI coding assistant</a:t>
             </a:r>
           </a:p>
         </p:txBody>
@@ -3359,7 +3359,7 @@
                 </a:solidFill>
                 <a:latin typeface="Calibri"/>
               </a:rPr>
-              <a:t>Eastern Australian gas market   ·   2025–2050   ·   nodal linear program</a:t>
+              <a:t>Eastern Australian &amp; NT gas market   ·   2025–2050   ·   nodal linear program</a:t>
             </a:r>
           </a:p>
         </p:txBody>
@@ -5852,7 +5852,7 @@
                 </a:solidFill>
                 <a:latin typeface="Calibri"/>
               </a:rPr>
-              <a:t>A nodal, least-cost optimisation of the Eastern Australian gas market that decides — for every day of every year to 2050 — where gas is produced, how it flows through the pipeline network, and what it costs at each hub.</a:t>
+              <a:t>A nodal, least-cost optimisation of the Eastern Australian &amp; NT gas market that decides — for every day of every year to 2050 — where gas is produced, how it flows through the pipeline network, and what it costs at each hub.</a:t>
             </a:r>
           </a:p>
         </p:txBody>
@@ -5982,7 +5982,7 @@
                 </a:solidFill>
                 <a:latin typeface="Calibri"/>
               </a:rPr>
-              <a:t>14 nodes</a:t>
+              <a:t>18 nodes</a:t>
             </a:r>
           </a:p>
         </p:txBody>
@@ -6024,7 +6024,7 @@
                 </a:solidFill>
                 <a:latin typeface="Calibri"/>
               </a:rPr>
-              <a:t>Producers, demand hubs, LNG trains and storages from Queensland to Tasmania</a:t>
+              <a:t>Producers, demand hubs, LNG trains and storages from the Northern Territory and Queensland to Tasmania</a:t>
             </a:r>
           </a:p>
         </p:txBody>

--- a/Building_GARY_with_AI.pptx
+++ b/Building_GARY_with_AI.pptx
@@ -6196,7 +6196,7 @@
                 </a:solidFill>
                 <a:latin typeface="Calibri"/>
               </a:rPr>
-              <a:t>Daily resolution, solved year-by-year from 2025 to 2050</a:t>
+              <a:t>Daily dispatch to 2050 with a perfect-foresight capacity layer</a:t>
             </a:r>
           </a:p>
         </p:txBody>
